--- a/public/templates/000_pm_suite/01_프로젝트 관리/07_의사소통관리/02_월간보고/프로젝트명_5월간보고_V1.0_20230530.pptx
+++ b/public/templates/000_pm_suite/01_프로젝트 관리/07_의사소통관리/02_월간보고/프로젝트명_5월간보고_V1.0_20230530.pptx
@@ -3105,7 +3105,7 @@
             <a:avLst/>
           </a:prstGeom>
           <a:solidFill>
-            <a:srgbClr val="1E293B"/>
+            <a:srgbClr val="0F2942"/>
           </a:solidFill>
           <a:ln>
             <a:noFill/>
@@ -3180,7 +3180,7 @@
               </a:defRPr>
             </a:pPr>
             <a:r>
-              <a:t>[한빛글로벌 SyncGuard AI] 2026년 8월 월간 공정 진척 보고서 (Monthly Report)</a:t>
+              <a:t>[한빛글로벌 SyncFlow AI] 제15주차 주간 / 월간 공정 진척 보고서</a:t>
             </a:r>
           </a:p>
           <a:p>
@@ -3305,7 +3305,7 @@
             <a:pPr>
               <a:defRPr sz="2200" b="1">
                 <a:solidFill>
-                  <a:srgbClr val="1E293B"/>
+                  <a:srgbClr val="0F2942"/>
                 </a:solidFill>
                 <a:latin typeface="Malgun Gothic"/>
               </a:defRPr>
@@ -3360,7 +3360,7 @@
                   </a:txBody>
                   <a:tcPr>
                     <a:solidFill>
-                      <a:srgbClr val="1E293B"/>
+                      <a:srgbClr val="0F2942"/>
                     </a:solidFill>
                   </a:tcPr>
                 </a:tc>
@@ -3382,7 +3382,7 @@
                   </a:txBody>
                   <a:tcPr>
                     <a:solidFill>
-                      <a:srgbClr val="1E293B"/>
+                      <a:srgbClr val="0F2942"/>
                     </a:solidFill>
                   </a:tcPr>
                 </a:tc>
@@ -3404,7 +3404,7 @@
                   </a:txBody>
                   <a:tcPr>
                     <a:solidFill>
-                      <a:srgbClr val="1E293B"/>
+                      <a:srgbClr val="0F2942"/>
                     </a:solidFill>
                   </a:tcPr>
                 </a:tc>
@@ -3426,7 +3426,7 @@
                   </a:txBody>
                   <a:tcPr>
                     <a:solidFill>
-                      <a:srgbClr val="1E293B"/>
+                      <a:srgbClr val="0F2942"/>
                     </a:solidFill>
                   </a:tcPr>
                 </a:tc>
@@ -3448,7 +3448,7 @@
                   </a:txBody>
                   <a:tcPr>
                     <a:solidFill>
-                      <a:srgbClr val="1E293B"/>
+                      <a:srgbClr val="0F2942"/>
                     </a:solidFill>
                   </a:tcPr>
                 </a:tc>
@@ -3462,7 +3462,7 @@
                       <a:r>
                         <a:rPr sz="1100">
                           <a:solidFill>
-                            <a:srgbClr val="334155"/>
+                            <a:srgbClr val="1E3A5F"/>
                           </a:solidFill>
                           <a:latin typeface="Malgun Gothic"/>
                         </a:rPr>
@@ -3484,7 +3484,7 @@
                       <a:r>
                         <a:rPr sz="1100">
                           <a:solidFill>
-                            <a:srgbClr val="334155"/>
+                            <a:srgbClr val="1E3A5F"/>
                           </a:solidFill>
                           <a:latin typeface="Malgun Gothic"/>
                         </a:rPr>
@@ -3506,7 +3506,7 @@
                       <a:r>
                         <a:rPr sz="1100">
                           <a:solidFill>
-                            <a:srgbClr val="334155"/>
+                            <a:srgbClr val="1E3A5F"/>
                           </a:solidFill>
                           <a:latin typeface="Malgun Gothic"/>
                         </a:rPr>
@@ -3528,7 +3528,7 @@
                       <a:r>
                         <a:rPr sz="1100">
                           <a:solidFill>
-                            <a:srgbClr val="334155"/>
+                            <a:srgbClr val="1E3A5F"/>
                           </a:solidFill>
                           <a:latin typeface="Malgun Gothic"/>
                         </a:rPr>
@@ -3550,7 +3550,7 @@
                       <a:r>
                         <a:rPr sz="1100">
                           <a:solidFill>
-                            <a:srgbClr val="334155"/>
+                            <a:srgbClr val="1E3A5F"/>
                           </a:solidFill>
                           <a:latin typeface="Malgun Gothic"/>
                         </a:rPr>
@@ -3574,7 +3574,7 @@
                       <a:r>
                         <a:rPr sz="1100">
                           <a:solidFill>
-                            <a:srgbClr val="334155"/>
+                            <a:srgbClr val="1E3A5F"/>
                           </a:solidFill>
                           <a:latin typeface="Malgun Gothic"/>
                         </a:rPr>
@@ -3596,7 +3596,7 @@
                       <a:r>
                         <a:rPr sz="1100">
                           <a:solidFill>
-                            <a:srgbClr val="334155"/>
+                            <a:srgbClr val="1E3A5F"/>
                           </a:solidFill>
                           <a:latin typeface="Malgun Gothic"/>
                         </a:rPr>
@@ -3618,7 +3618,7 @@
                       <a:r>
                         <a:rPr sz="1100">
                           <a:solidFill>
-                            <a:srgbClr val="334155"/>
+                            <a:srgbClr val="1E3A5F"/>
                           </a:solidFill>
                           <a:latin typeface="Malgun Gothic"/>
                         </a:rPr>
@@ -3640,7 +3640,7 @@
                       <a:r>
                         <a:rPr sz="1100">
                           <a:solidFill>
-                            <a:srgbClr val="334155"/>
+                            <a:srgbClr val="1E3A5F"/>
                           </a:solidFill>
                           <a:latin typeface="Malgun Gothic"/>
                         </a:rPr>
@@ -3662,7 +3662,7 @@
                       <a:r>
                         <a:rPr sz="1100">
                           <a:solidFill>
-                            <a:srgbClr val="334155"/>
+                            <a:srgbClr val="1E3A5F"/>
                           </a:solidFill>
                           <a:latin typeface="Malgun Gothic"/>
                         </a:rPr>
@@ -3686,7 +3686,7 @@
                       <a:r>
                         <a:rPr sz="1100">
                           <a:solidFill>
-                            <a:srgbClr val="334155"/>
+                            <a:srgbClr val="1E3A5F"/>
                           </a:solidFill>
                           <a:latin typeface="Malgun Gothic"/>
                         </a:rPr>
@@ -3708,7 +3708,7 @@
                       <a:r>
                         <a:rPr sz="1100">
                           <a:solidFill>
-                            <a:srgbClr val="334155"/>
+                            <a:srgbClr val="1E3A5F"/>
                           </a:solidFill>
                           <a:latin typeface="Malgun Gothic"/>
                         </a:rPr>
@@ -3730,7 +3730,7 @@
                       <a:r>
                         <a:rPr sz="1100">
                           <a:solidFill>
-                            <a:srgbClr val="334155"/>
+                            <a:srgbClr val="1E3A5F"/>
                           </a:solidFill>
                           <a:latin typeface="Malgun Gothic"/>
                         </a:rPr>
@@ -3752,7 +3752,7 @@
                       <a:r>
                         <a:rPr sz="1100">
                           <a:solidFill>
-                            <a:srgbClr val="334155"/>
+                            <a:srgbClr val="1E3A5F"/>
                           </a:solidFill>
                           <a:latin typeface="Malgun Gothic"/>
                         </a:rPr>
@@ -3774,7 +3774,7 @@
                       <a:r>
                         <a:rPr sz="1100">
                           <a:solidFill>
-                            <a:srgbClr val="334155"/>
+                            <a:srgbClr val="1E3A5F"/>
                           </a:solidFill>
                           <a:latin typeface="Malgun Gothic"/>
                         </a:rPr>
@@ -3798,7 +3798,7 @@
                       <a:r>
                         <a:rPr sz="1100">
                           <a:solidFill>
-                            <a:srgbClr val="334155"/>
+                            <a:srgbClr val="1E3A5F"/>
                           </a:solidFill>
                           <a:latin typeface="Malgun Gothic"/>
                         </a:rPr>
@@ -3820,7 +3820,7 @@
                       <a:r>
                         <a:rPr sz="1100">
                           <a:solidFill>
-                            <a:srgbClr val="334155"/>
+                            <a:srgbClr val="1E3A5F"/>
                           </a:solidFill>
                           <a:latin typeface="Malgun Gothic"/>
                         </a:rPr>
@@ -3842,7 +3842,7 @@
                       <a:r>
                         <a:rPr sz="1100">
                           <a:solidFill>
-                            <a:srgbClr val="334155"/>
+                            <a:srgbClr val="1E3A5F"/>
                           </a:solidFill>
                           <a:latin typeface="Malgun Gothic"/>
                         </a:rPr>
@@ -3864,7 +3864,7 @@
                       <a:r>
                         <a:rPr sz="1100">
                           <a:solidFill>
-                            <a:srgbClr val="334155"/>
+                            <a:srgbClr val="1E3A5F"/>
                           </a:solidFill>
                           <a:latin typeface="Malgun Gothic"/>
                         </a:rPr>
@@ -3886,7 +3886,7 @@
                       <a:r>
                         <a:rPr sz="1100">
                           <a:solidFill>
-                            <a:srgbClr val="334155"/>
+                            <a:srgbClr val="1E3A5F"/>
                           </a:solidFill>
                           <a:latin typeface="Malgun Gothic"/>
                         </a:rPr>
@@ -3910,7 +3910,7 @@
                       <a:r>
                         <a:rPr sz="1100">
                           <a:solidFill>
-                            <a:srgbClr val="334155"/>
+                            <a:srgbClr val="1E3A5F"/>
                           </a:solidFill>
                           <a:latin typeface="Malgun Gothic"/>
                         </a:rPr>
@@ -3932,7 +3932,7 @@
                       <a:r>
                         <a:rPr sz="1100">
                           <a:solidFill>
-                            <a:srgbClr val="334155"/>
+                            <a:srgbClr val="1E3A5F"/>
                           </a:solidFill>
                           <a:latin typeface="Malgun Gothic"/>
                         </a:rPr>
@@ -3954,7 +3954,7 @@
                       <a:r>
                         <a:rPr sz="1100">
                           <a:solidFill>
-                            <a:srgbClr val="334155"/>
+                            <a:srgbClr val="1E3A5F"/>
                           </a:solidFill>
                           <a:latin typeface="Malgun Gothic"/>
                         </a:rPr>
@@ -3976,7 +3976,7 @@
                       <a:r>
                         <a:rPr sz="1100">
                           <a:solidFill>
-                            <a:srgbClr val="334155"/>
+                            <a:srgbClr val="1E3A5F"/>
                           </a:solidFill>
                           <a:latin typeface="Malgun Gothic"/>
                         </a:rPr>
@@ -3998,7 +3998,7 @@
                       <a:r>
                         <a:rPr sz="1100">
                           <a:solidFill>
-                            <a:srgbClr val="334155"/>
+                            <a:srgbClr val="1E3A5F"/>
                           </a:solidFill>
                           <a:latin typeface="Malgun Gothic"/>
                         </a:rPr>
@@ -4105,7 +4105,7 @@
             <a:pPr>
               <a:defRPr sz="2200" b="1">
                 <a:solidFill>
-                  <a:srgbClr val="1E293B"/>
+                  <a:srgbClr val="0F2942"/>
                 </a:solidFill>
                 <a:latin typeface="Malgun Gothic"/>
               </a:defRPr>
@@ -4147,13 +4147,13 @@
               </a:spcAft>
               <a:defRPr sz="1400">
                 <a:solidFill>
-                  <a:srgbClr val="334155"/>
+                  <a:srgbClr val="1E3A5F"/>
                 </a:solidFill>
                 <a:latin typeface="Malgun Gothic"/>
               </a:defRPr>
             </a:pPr>
             <a:r>
-              <a:t>•  금주 실적 1: 100대 표시·광고 규제 룰셋 및 3단계 하이브리드 RAG 추론 파이프라인 단위 테스트 100% 통과</a:t>
+              <a:t>•  금주 실적 1: 100대 계약·기술규격 규제 룰셋 및 3단계 하이브리드 RAG 추론 파이프라인 단위 테스트 100% 통과</a:t>
             </a:r>
           </a:p>
           <a:p>
@@ -4166,13 +4166,13 @@
               </a:spcAft>
               <a:defRPr sz="1400">
                 <a:solidFill>
-                  <a:srgbClr val="334155"/>
+                  <a:srgbClr val="1E3A5F"/>
                 </a:solidFill>
                 <a:latin typeface="Malgun Gothic"/>
               </a:defRPr>
             </a:pPr>
             <a:r>
-              <a:t>•  금주 실적 2: ProductLab 전성분 뷰 및 MarketingHub Webhook 연동 OpenAPI Mock 서버 조기 배포</a:t>
+              <a:t>•  금주 실적 2: PLM-Nexus 자재BOM 뷰 및 SRM-Portal Webhook 연동 OpenAPI Mock 서버 조기 배포</a:t>
             </a:r>
           </a:p>
           <a:p>
@@ -4185,13 +4185,13 @@
               </a:spcAft>
               <a:defRPr sz="1400">
                 <a:solidFill>
-                  <a:srgbClr val="334155"/>
+                  <a:srgbClr val="1E3A5F"/>
                 </a:solidFill>
                 <a:latin typeface="Malgun Gothic"/>
               </a:defRPr>
             </a:pPr>
             <a:r>
-              <a:t>•  차주 계획 1: HB-SSO 통합인증 및 사용자 심의 포털(FO)·백오피스(BO) 28개 화면 라우팅 통합</a:t>
+              <a:t>•  차주 계획 1: HB-SSO 통합인증 및 사용자 검증 포털(FO)·백오피스(BO) 28개 화면 라우팅 통합</a:t>
             </a:r>
           </a:p>
           <a:p>
@@ -4204,7 +4204,7 @@
               </a:spcAft>
               <a:defRPr sz="1400">
                 <a:solidFill>
-                  <a:srgbClr val="334155"/>
+                  <a:srgbClr val="1E3A5F"/>
                 </a:solidFill>
                 <a:latin typeface="Malgun Gothic"/>
               </a:defRPr>
